--- a/docs/reports/台灣產業趨勢監測週報_2026-09-14_2026-09-21.pptx
+++ b/docs/reports/台灣產業趨勢監測週報_2026-09-14_2026-09-21.pptx
@@ -183,37 +183,37 @@
                 <c:formatCode>General</c:formatCode>
                 <c:ptCount val="11"/>
                 <c:pt idx="0">
-                  <c:v>50</c:v>
+                  <c:v>54</c:v>
                 </c:pt>
                 <c:pt idx="1">
-                  <c:v>129</c:v>
+                  <c:v>137</c:v>
                 </c:pt>
                 <c:pt idx="2">
-                  <c:v>166</c:v>
+                  <c:v>176</c:v>
                 </c:pt>
                 <c:pt idx="3">
-                  <c:v>222</c:v>
+                  <c:v>230</c:v>
                 </c:pt>
                 <c:pt idx="4">
-                  <c:v>295</c:v>
+                  <c:v>300</c:v>
                 </c:pt>
                 <c:pt idx="5">
-                  <c:v>316</c:v>
+                  <c:v>336</c:v>
                 </c:pt>
                 <c:pt idx="6">
-                  <c:v>331</c:v>
+                  <c:v>339</c:v>
                 </c:pt>
                 <c:pt idx="7">
-                  <c:v>384</c:v>
+                  <c:v>403</c:v>
                 </c:pt>
                 <c:pt idx="8">
-                  <c:v>706</c:v>
+                  <c:v>740</c:v>
                 </c:pt>
                 <c:pt idx="9">
-                  <c:v>858</c:v>
+                  <c:v>907</c:v>
                 </c:pt>
                 <c:pt idx="10">
-                  <c:v>895</c:v>
+                  <c:v>929</c:v>
                 </c:pt>
               </c:numCache>
             </c:numRef>
@@ -302,10 +302,10 @@
                   <c:v>宏碁</c:v>
                 </c:pt>
                 <c:pt idx="1">
+                  <c:v>聯想</c:v>
+                </c:pt>
+                <c:pt idx="2">
                   <c:v>華碩</c:v>
-                </c:pt>
-                <c:pt idx="2">
-                  <c:v>聯想</c:v>
                 </c:pt>
                 <c:pt idx="3">
                   <c:v>微星</c:v>
@@ -329,10 +329,10 @@
                 <c:formatCode>General</c:formatCode>
                 <c:ptCount val="7"/>
                 <c:pt idx="0">
-                  <c:v>34</c:v>
+                  <c:v>35</c:v>
                 </c:pt>
                 <c:pt idx="1">
-                  <c:v>14</c:v>
+                  <c:v>15</c:v>
                 </c:pt>
                 <c:pt idx="2">
                   <c:v>14</c:v>
@@ -347,7 +347,7 @@
                   <c:v>7</c:v>
                 </c:pt>
                 <c:pt idx="6">
-                  <c:v>1</c:v>
+                  <c:v>2</c:v>
                 </c:pt>
               </c:numCache>
             </c:numRef>
@@ -376,10 +376,10 @@
                   <c:v>宏碁</c:v>
                 </c:pt>
                 <c:pt idx="1">
+                  <c:v>聯想</c:v>
+                </c:pt>
+                <c:pt idx="2">
                   <c:v>華碩</c:v>
-                </c:pt>
-                <c:pt idx="2">
-                  <c:v>聯想</c:v>
                 </c:pt>
                 <c:pt idx="3">
                   <c:v>微星</c:v>
@@ -406,10 +406,10 @@
                   <c:v>28</c:v>
                 </c:pt>
                 <c:pt idx="1">
+                  <c:v>10</c:v>
+                </c:pt>
+                <c:pt idx="2">
                   <c:v>35</c:v>
-                </c:pt>
-                <c:pt idx="2">
-                  <c:v>10</c:v>
                 </c:pt>
                 <c:pt idx="3">
                   <c:v>15</c:v>
@@ -538,16 +538,16 @@
                 <c:formatCode>General</c:formatCode>
                 <c:ptCount val="6"/>
                 <c:pt idx="0">
-                  <c:v>186</c:v>
+                  <c:v>204</c:v>
                 </c:pt>
                 <c:pt idx="1">
-                  <c:v>102</c:v>
+                  <c:v>107</c:v>
                 </c:pt>
                 <c:pt idx="2">
-                  <c:v>42</c:v>
+                  <c:v>53</c:v>
                 </c:pt>
                 <c:pt idx="3">
-                  <c:v>42</c:v>
+                  <c:v>44</c:v>
                 </c:pt>
                 <c:pt idx="4">
                   <c:v>34</c:v>
@@ -3705,7 +3705,7 @@
           </a:p>
           <a:p>
             <a:r>
-              <a:t>產出:2026-09-21 13:46(台北時間)</a:t>
+              <a:t>產出:2026-09-21 17:57(台北時間)</a:t>
             </a:r>
           </a:p>
           <a:p>
@@ -3773,7 +3773,7 @@
               <a:defRPr sz="1600"/>
             </a:pPr>
             <a:r>
-              <a:t>本期共蒐集 8685 篇公開報導,可歸類 4352 篇</a:t>
+              <a:t>本期共蒐集 9047 篇公開報導,可歸類 4551 篇</a:t>
             </a:r>
           </a:p>
           <a:p>
@@ -3781,7 +3781,7 @@
               <a:defRPr sz="1600"/>
             </a:pPr>
             <a:r>
-              <a:t>金融業:895 篇(佔可歸類 20.6%)</a:t>
+              <a:t>金融業:929 篇(佔可歸類 20.4%)</a:t>
             </a:r>
           </a:p>
           <a:p>
@@ -3789,7 +3789,7 @@
               <a:defRPr sz="1600"/>
             </a:pPr>
             <a:r>
-              <a:t>高科技製造業:858 篇(佔可歸類 19.7%)</a:t>
+              <a:t>高科技製造業:907 篇(佔可歸類 19.9%)</a:t>
             </a:r>
           </a:p>
           <a:p>
@@ -3797,7 +3797,7 @@
               <a:defRPr sz="1600"/>
             </a:pPr>
             <a:r>
-              <a:t>政府教育單位:706 篇(佔可歸類 16.2%)</a:t>
+              <a:t>政府教育單位:740 篇(佔可歸類 16.3%)</a:t>
             </a:r>
           </a:p>
           <a:p>
@@ -3805,7 +3805,7 @@
               <a:defRPr sz="1600"/>
             </a:pPr>
             <a:r>
-              <a:t>最熱主題:AI 與自動化(949 篇)、利率與資金環境(480 篇)、人力與人口結構(240 篇)</a:t>
+              <a:t>最熱主題:AI 與自動化(984 篇)、利率與資金環境(490 篇)、人力與人口結構(247 篇)</a:t>
             </a:r>
           </a:p>
           <a:p>
@@ -3909,7 +3909,7 @@
           <a:lstStyle/>
           <a:p>
             <a:r>
-              <a:t>競品聲量對比(SOV)— 電腦品牌(合計 87 篇)</a:t>
+              <a:t>競品聲量對比(SOV)— 電腦品牌(合計 90 篇)</a:t>
             </a:r>
           </a:p>
         </p:txBody>
@@ -3966,7 +3966,7 @@
           <a:lstStyle/>
           <a:p>
             <a:r>
-              <a:t>競品聲量對比(SOV)— 半導體(合計 427 篇)</a:t>
+              <a:t>競品聲量對比(SOV)— 半導體(合計 463 篇)</a:t>
             </a:r>
           </a:p>
         </p:txBody>
@@ -4063,7 +4063,7 @@
               <a:defRPr sz="1600"/>
             </a:pPr>
             <a:r>
-              <a:t>台積電:疑似負面 5 篇(命中:求償、爆炸、瑕疵、詐欺)</a:t>
+              <a:t>合庫金:疑似負面 5 篇(命中:外洩、工安、詐欺、詐騙)</a:t>
             </a:r>
           </a:p>
           <a:p>
@@ -4071,7 +4071,7 @@
               <a:defRPr sz="1600"/>
             </a:pPr>
             <a:r>
-              <a:t>華南金:疑似負面 2 篇(命中:詐騙)</a:t>
+              <a:t>台積電:疑似負面 5 篇(命中:求償、爆炸、瑕疵、詐欺)</a:t>
             </a:r>
           </a:p>
           <a:p>
@@ -4079,7 +4079,7 @@
               <a:defRPr sz="1600"/>
             </a:pPr>
             <a:r>
-              <a:t>緯創:疑似負面 2 篇(命中:抄襲)</a:t>
+              <a:t>華南金:疑似負面 2 篇(命中:詐騙)</a:t>
             </a:r>
           </a:p>
           <a:p>
@@ -4087,7 +4087,7 @@
               <a:defRPr sz="1600"/>
             </a:pPr>
             <a:r>
-              <a:t>輝達:疑似負面 2 篇(命中:抄襲、抵制、資安事件)</a:t>
+              <a:t>緯創:疑似負面 2 篇(命中:抄襲)</a:t>
             </a:r>
           </a:p>
           <a:p>
@@ -4095,7 +4095,7 @@
               <a:defRPr sz="1600"/>
             </a:pPr>
             <a:r>
-              <a:t>美光:疑似負面 2 篇(命中:罷工)</a:t>
+              <a:t>輝達:疑似負面 2 篇(命中:抄襲、抵制、資安事件)</a:t>
             </a:r>
           </a:p>
           <a:p>
@@ -4103,7 +4103,7 @@
               <a:defRPr sz="1600"/>
             </a:pPr>
             <a:r>
-              <a:t>清大:疑似負面 1 篇(命中:違法)</a:t>
+              <a:t>美光:疑似負面 2 篇(命中:罷工)</a:t>
             </a:r>
           </a:p>
           <a:p>

--- a/docs/reports/台灣產業趨勢監測週報_2026-09-14_2026-09-21.pptx
+++ b/docs/reports/台灣產業趨勢監測週報_2026-09-14_2026-09-21.pptx
@@ -183,37 +183,37 @@
                 <c:formatCode>General</c:formatCode>
                 <c:ptCount val="11"/>
                 <c:pt idx="0">
-                  <c:v>54</c:v>
+                  <c:v>60</c:v>
                 </c:pt>
                 <c:pt idx="1">
-                  <c:v>137</c:v>
+                  <c:v>140</c:v>
                 </c:pt>
                 <c:pt idx="2">
-                  <c:v>176</c:v>
+                  <c:v>180</c:v>
                 </c:pt>
                 <c:pt idx="3">
-                  <c:v>230</c:v>
+                  <c:v>232</c:v>
                 </c:pt>
                 <c:pt idx="4">
-                  <c:v>300</c:v>
+                  <c:v>302</c:v>
                 </c:pt>
                 <c:pt idx="5">
-                  <c:v>336</c:v>
+                  <c:v>344</c:v>
                 </c:pt>
                 <c:pt idx="6">
-                  <c:v>339</c:v>
+                  <c:v>354</c:v>
                 </c:pt>
                 <c:pt idx="7">
-                  <c:v>403</c:v>
+                  <c:v>416</c:v>
                 </c:pt>
                 <c:pt idx="8">
-                  <c:v>740</c:v>
+                  <c:v>756</c:v>
                 </c:pt>
                 <c:pt idx="9">
-                  <c:v>907</c:v>
+                  <c:v>925</c:v>
                 </c:pt>
                 <c:pt idx="10">
-                  <c:v>929</c:v>
+                  <c:v>944</c:v>
                 </c:pt>
               </c:numCache>
             </c:numRef>
@@ -302,10 +302,10 @@
                   <c:v>宏碁</c:v>
                 </c:pt>
                 <c:pt idx="1">
+                  <c:v>華碩</c:v>
+                </c:pt>
+                <c:pt idx="2">
                   <c:v>聯想</c:v>
-                </c:pt>
-                <c:pt idx="2">
-                  <c:v>華碩</c:v>
                 </c:pt>
                 <c:pt idx="3">
                   <c:v>微星</c:v>
@@ -329,16 +329,16 @@
                 <c:formatCode>General</c:formatCode>
                 <c:ptCount val="7"/>
                 <c:pt idx="0">
-                  <c:v>35</c:v>
+                  <c:v>36</c:v>
                 </c:pt>
                 <c:pt idx="1">
                   <c:v>15</c:v>
                 </c:pt>
                 <c:pt idx="2">
-                  <c:v>14</c:v>
+                  <c:v>15</c:v>
                 </c:pt>
                 <c:pt idx="3">
-                  <c:v>10</c:v>
+                  <c:v>11</c:v>
                 </c:pt>
                 <c:pt idx="4">
                   <c:v>7</c:v>
@@ -376,10 +376,10 @@
                   <c:v>宏碁</c:v>
                 </c:pt>
                 <c:pt idx="1">
+                  <c:v>華碩</c:v>
+                </c:pt>
+                <c:pt idx="2">
                   <c:v>聯想</c:v>
-                </c:pt>
-                <c:pt idx="2">
-                  <c:v>華碩</c:v>
                 </c:pt>
                 <c:pt idx="3">
                   <c:v>微星</c:v>
@@ -406,10 +406,10 @@
                   <c:v>28</c:v>
                 </c:pt>
                 <c:pt idx="1">
+                  <c:v>35</c:v>
+                </c:pt>
+                <c:pt idx="2">
                   <c:v>10</c:v>
-                </c:pt>
-                <c:pt idx="2">
-                  <c:v>35</c:v>
                 </c:pt>
                 <c:pt idx="3">
                   <c:v>15</c:v>
@@ -538,13 +538,13 @@
                 <c:formatCode>General</c:formatCode>
                 <c:ptCount val="6"/>
                 <c:pt idx="0">
-                  <c:v>204</c:v>
+                  <c:v>208</c:v>
                 </c:pt>
                 <c:pt idx="1">
-                  <c:v>107</c:v>
+                  <c:v>112</c:v>
                 </c:pt>
                 <c:pt idx="2">
-                  <c:v>53</c:v>
+                  <c:v>55</c:v>
                 </c:pt>
                 <c:pt idx="3">
                   <c:v>44</c:v>
@@ -3705,7 +3705,7 @@
           </a:p>
           <a:p>
             <a:r>
-              <a:t>產出:2026-09-21 17:57(台北時間)</a:t>
+              <a:t>產出:2026-09-21 19:03(台北時間)</a:t>
             </a:r>
           </a:p>
           <a:p>
@@ -3773,7 +3773,7 @@
               <a:defRPr sz="1600"/>
             </a:pPr>
             <a:r>
-              <a:t>本期共蒐集 9047 篇公開報導,可歸類 4551 篇</a:t>
+              <a:t>本期共蒐集 9232 篇公開報導,可歸類 4653 篇</a:t>
             </a:r>
           </a:p>
           <a:p>
@@ -3781,7 +3781,7 @@
               <a:defRPr sz="1600"/>
             </a:pPr>
             <a:r>
-              <a:t>金融業:929 篇(佔可歸類 20.4%)</a:t>
+              <a:t>金融業:944 篇(佔可歸類 20.3%)</a:t>
             </a:r>
           </a:p>
           <a:p>
@@ -3789,7 +3789,7 @@
               <a:defRPr sz="1600"/>
             </a:pPr>
             <a:r>
-              <a:t>高科技製造業:907 篇(佔可歸類 19.9%)</a:t>
+              <a:t>高科技製造業:925 篇(佔可歸類 19.9%)</a:t>
             </a:r>
           </a:p>
           <a:p>
@@ -3797,7 +3797,7 @@
               <a:defRPr sz="1600"/>
             </a:pPr>
             <a:r>
-              <a:t>政府教育單位:740 篇(佔可歸類 16.3%)</a:t>
+              <a:t>政府教育單位:756 篇(佔可歸類 16.2%)</a:t>
             </a:r>
           </a:p>
           <a:p>
@@ -3805,7 +3805,7 @@
               <a:defRPr sz="1600"/>
             </a:pPr>
             <a:r>
-              <a:t>最熱主題:AI 與自動化(984 篇)、利率與資金環境(490 篇)、人力與人口結構(247 篇)</a:t>
+              <a:t>最熱主題:AI 與自動化(1012 篇)、利率與資金環境(496 篇)、人力與人口結構(255 篇)</a:t>
             </a:r>
           </a:p>
           <a:p>
@@ -3909,7 +3909,7 @@
           <a:lstStyle/>
           <a:p>
             <a:r>
-              <a:t>競品聲量對比(SOV)— 電腦品牌(合計 90 篇)</a:t>
+              <a:t>競品聲量對比(SOV)— 電腦品牌(合計 93 篇)</a:t>
             </a:r>
           </a:p>
         </p:txBody>
@@ -3966,7 +3966,7 @@
           <a:lstStyle/>
           <a:p>
             <a:r>
-              <a:t>競品聲量對比(SOV)— 半導體(合計 463 篇)</a:t>
+              <a:t>競品聲量對比(SOV)— 半導體(合計 474 篇)</a:t>
             </a:r>
           </a:p>
         </p:txBody>
@@ -4047,7 +4047,7 @@
               <a:defRPr sz="1600"/>
             </a:pPr>
             <a:r>
-              <a:t>長榮航空:疑似負面 6 篇(命中:外洩、爆炸、資安事件、駭客)</a:t>
+              <a:t>Meta:疑似負面 7 篇(命中:求償、火災、詐欺、詐騙)</a:t>
             </a:r>
           </a:p>
           <a:p>
@@ -4055,7 +4055,7 @@
               <a:defRPr sz="1600"/>
             </a:pPr>
             <a:r>
-              <a:t>Meta:疑似負面 6 篇(命中:求償、詐欺、詐騙、起訴)</a:t>
+              <a:t>長榮航空:疑似負面 6 篇(命中:外洩、爆炸、資安事件、駭客)</a:t>
             </a:r>
           </a:p>
           <a:p>
